--- a/28_College/campus_module/Session_6_Control_Harassment_and_Upstanders_Slides.pptx
+++ b/28_College/campus_module/Session_6_Control_Harassment_and_Upstanders_Slides.pptx
@@ -4426,7 +4426,7 @@
                 </a:solidFill>
                 <a:latin typeface="Segoe UI"/>
               </a:rPr>
-              <a:t>A free kit by Competence Collective</a:t>
+              <a:t>Hackles · a free kit · quillsup.org</a:t>
             </a:r>
           </a:p>
           <a:p>
